--- a/figures/pptx/Figure_1.pptx
+++ b/figures/pptx/Figure_1.pptx
@@ -243,7 +243,7 @@
           <a:p>
             <a:fld id="{ED160DB6-C0DC-8946-AD05-C0754294CFDE}" type="datetimeFigureOut">
               <a:rPr lang="fr-FR" smtClean="0"/>
-              <a:t>29/07/2025</a:t>
+              <a:t>08/08/2025</a:t>
             </a:fld>
             <a:endParaRPr lang="fr-FR"/>
           </a:p>
@@ -413,7 +413,7 @@
           <a:p>
             <a:fld id="{ED160DB6-C0DC-8946-AD05-C0754294CFDE}" type="datetimeFigureOut">
               <a:rPr lang="fr-FR" smtClean="0"/>
-              <a:t>29/07/2025</a:t>
+              <a:t>08/08/2025</a:t>
             </a:fld>
             <a:endParaRPr lang="fr-FR"/>
           </a:p>
@@ -593,7 +593,7 @@
           <a:p>
             <a:fld id="{ED160DB6-C0DC-8946-AD05-C0754294CFDE}" type="datetimeFigureOut">
               <a:rPr lang="fr-FR" smtClean="0"/>
-              <a:t>29/07/2025</a:t>
+              <a:t>08/08/2025</a:t>
             </a:fld>
             <a:endParaRPr lang="fr-FR"/>
           </a:p>
@@ -763,7 +763,7 @@
           <a:p>
             <a:fld id="{ED160DB6-C0DC-8946-AD05-C0754294CFDE}" type="datetimeFigureOut">
               <a:rPr lang="fr-FR" smtClean="0"/>
-              <a:t>29/07/2025</a:t>
+              <a:t>08/08/2025</a:t>
             </a:fld>
             <a:endParaRPr lang="fr-FR"/>
           </a:p>
@@ -1007,7 +1007,7 @@
           <a:p>
             <a:fld id="{ED160DB6-C0DC-8946-AD05-C0754294CFDE}" type="datetimeFigureOut">
               <a:rPr lang="fr-FR" smtClean="0"/>
-              <a:t>29/07/2025</a:t>
+              <a:t>08/08/2025</a:t>
             </a:fld>
             <a:endParaRPr lang="fr-FR"/>
           </a:p>
@@ -1239,7 +1239,7 @@
           <a:p>
             <a:fld id="{ED160DB6-C0DC-8946-AD05-C0754294CFDE}" type="datetimeFigureOut">
               <a:rPr lang="fr-FR" smtClean="0"/>
-              <a:t>29/07/2025</a:t>
+              <a:t>08/08/2025</a:t>
             </a:fld>
             <a:endParaRPr lang="fr-FR"/>
           </a:p>
@@ -1606,7 +1606,7 @@
           <a:p>
             <a:fld id="{ED160DB6-C0DC-8946-AD05-C0754294CFDE}" type="datetimeFigureOut">
               <a:rPr lang="fr-FR" smtClean="0"/>
-              <a:t>29/07/2025</a:t>
+              <a:t>08/08/2025</a:t>
             </a:fld>
             <a:endParaRPr lang="fr-FR"/>
           </a:p>
@@ -1724,7 +1724,7 @@
           <a:p>
             <a:fld id="{ED160DB6-C0DC-8946-AD05-C0754294CFDE}" type="datetimeFigureOut">
               <a:rPr lang="fr-FR" smtClean="0"/>
-              <a:t>29/07/2025</a:t>
+              <a:t>08/08/2025</a:t>
             </a:fld>
             <a:endParaRPr lang="fr-FR"/>
           </a:p>
@@ -1819,7 +1819,7 @@
           <a:p>
             <a:fld id="{ED160DB6-C0DC-8946-AD05-C0754294CFDE}" type="datetimeFigureOut">
               <a:rPr lang="fr-FR" smtClean="0"/>
-              <a:t>29/07/2025</a:t>
+              <a:t>08/08/2025</a:t>
             </a:fld>
             <a:endParaRPr lang="fr-FR"/>
           </a:p>
@@ -2096,7 +2096,7 @@
           <a:p>
             <a:fld id="{ED160DB6-C0DC-8946-AD05-C0754294CFDE}" type="datetimeFigureOut">
               <a:rPr lang="fr-FR" smtClean="0"/>
-              <a:t>29/07/2025</a:t>
+              <a:t>08/08/2025</a:t>
             </a:fld>
             <a:endParaRPr lang="fr-FR"/>
           </a:p>
@@ -2353,7 +2353,7 @@
           <a:p>
             <a:fld id="{ED160DB6-C0DC-8946-AD05-C0754294CFDE}" type="datetimeFigureOut">
               <a:rPr lang="fr-FR" smtClean="0"/>
-              <a:t>29/07/2025</a:t>
+              <a:t>08/08/2025</a:t>
             </a:fld>
             <a:endParaRPr lang="fr-FR"/>
           </a:p>
@@ -2566,7 +2566,7 @@
           <a:p>
             <a:fld id="{ED160DB6-C0DC-8946-AD05-C0754294CFDE}" type="datetimeFigureOut">
               <a:rPr lang="fr-FR" smtClean="0"/>
-              <a:t>29/07/2025</a:t>
+              <a:t>08/08/2025</a:t>
             </a:fld>
             <a:endParaRPr lang="fr-FR"/>
           </a:p>
@@ -3020,7 +3020,7 @@
         </p:nvSpPr>
         <p:spPr>
           <a:xfrm>
-            <a:off x="1017173" y="3088"/>
+            <a:off x="971453" y="3088"/>
             <a:ext cx="274434" cy="184666"/>
           </a:xfrm>
           <a:prstGeom prst="rect">
@@ -3055,7 +3055,7 @@
         </p:nvSpPr>
         <p:spPr>
           <a:xfrm>
-            <a:off x="2020600" y="0"/>
+            <a:off x="1952020" y="0"/>
             <a:ext cx="274434" cy="184666"/>
           </a:xfrm>
           <a:prstGeom prst="rect">
@@ -3325,10 +3325,10 @@
       </p:sp>
       <p:pic>
         <p:nvPicPr>
-          <p:cNvPr id="4" name="Image 3">
+          <p:cNvPr id="6" name="Image 5">
             <a:extLst>
               <a:ext uri="{FF2B5EF4-FFF2-40B4-BE49-F238E27FC236}">
-                <a16:creationId xmlns:a16="http://schemas.microsoft.com/office/drawing/2014/main" id="{A8E51BD2-F738-9EEA-D167-0BF56F4AF5FD}"/>
+                <a16:creationId xmlns:a16="http://schemas.microsoft.com/office/drawing/2014/main" id="{96F5B523-170F-2C21-8A76-7AF7D7A17C4D}"/>
               </a:ext>
             </a:extLst>
           </p:cNvPr>
@@ -3345,8 +3345,8 @@
         </p:blipFill>
         <p:spPr>
           <a:xfrm>
-            <a:off x="0" y="-3475"/>
-            <a:ext cx="3060700" cy="1530350"/>
+            <a:off x="105627" y="-26628"/>
+            <a:ext cx="2925646" cy="1462823"/>
           </a:xfrm>
           <a:prstGeom prst="rect">
             <a:avLst/>
